--- a/assets/pf_overview_nocaption.pptx
+++ b/assets/pf_overview_nocaption.pptx
@@ -218,7 +218,7 @@
           <a:p>
             <a:fld id="{2F1859D8-B66A-47F9-B914-23B1751CA91A}" type="datetimeFigureOut">
               <a:rPr lang="en-US" smtClean="0"/>
-              <a:t>3/13/26</a:t>
+              <a:t>3/14/26</a:t>
             </a:fld>
             <a:endParaRPr lang="en-US"/>
           </a:p>
@@ -730,7 +730,7 @@
           <a:p>
             <a:fld id="{A2B6AD91-4B23-4744-80DD-8D3955A9F328}" type="datetimeFigureOut">
               <a:rPr lang="en-US" smtClean="0"/>
-              <a:t>3/13/26</a:t>
+              <a:t>3/14/26</a:t>
             </a:fld>
             <a:endParaRPr lang="en-US"/>
           </a:p>
@@ -900,7 +900,7 @@
           <a:p>
             <a:fld id="{A2B6AD91-4B23-4744-80DD-8D3955A9F328}" type="datetimeFigureOut">
               <a:rPr lang="en-US" smtClean="0"/>
-              <a:t>3/13/26</a:t>
+              <a:t>3/14/26</a:t>
             </a:fld>
             <a:endParaRPr lang="en-US"/>
           </a:p>
@@ -1080,7 +1080,7 @@
           <a:p>
             <a:fld id="{A2B6AD91-4B23-4744-80DD-8D3955A9F328}" type="datetimeFigureOut">
               <a:rPr lang="en-US" smtClean="0"/>
-              <a:t>3/13/26</a:t>
+              <a:t>3/14/26</a:t>
             </a:fld>
             <a:endParaRPr lang="en-US"/>
           </a:p>
@@ -1250,7 +1250,7 @@
           <a:p>
             <a:fld id="{A2B6AD91-4B23-4744-80DD-8D3955A9F328}" type="datetimeFigureOut">
               <a:rPr lang="en-US" smtClean="0"/>
-              <a:t>3/13/26</a:t>
+              <a:t>3/14/26</a:t>
             </a:fld>
             <a:endParaRPr lang="en-US"/>
           </a:p>
@@ -1496,7 +1496,7 @@
           <a:p>
             <a:fld id="{A2B6AD91-4B23-4744-80DD-8D3955A9F328}" type="datetimeFigureOut">
               <a:rPr lang="en-US" smtClean="0"/>
-              <a:t>3/13/26</a:t>
+              <a:t>3/14/26</a:t>
             </a:fld>
             <a:endParaRPr lang="en-US"/>
           </a:p>
@@ -1728,7 +1728,7 @@
           <a:p>
             <a:fld id="{A2B6AD91-4B23-4744-80DD-8D3955A9F328}" type="datetimeFigureOut">
               <a:rPr lang="en-US" smtClean="0"/>
-              <a:t>3/13/26</a:t>
+              <a:t>3/14/26</a:t>
             </a:fld>
             <a:endParaRPr lang="en-US"/>
           </a:p>
@@ -2095,7 +2095,7 @@
           <a:p>
             <a:fld id="{A2B6AD91-4B23-4744-80DD-8D3955A9F328}" type="datetimeFigureOut">
               <a:rPr lang="en-US" smtClean="0"/>
-              <a:t>3/13/26</a:t>
+              <a:t>3/14/26</a:t>
             </a:fld>
             <a:endParaRPr lang="en-US"/>
           </a:p>
@@ -2213,7 +2213,7 @@
           <a:p>
             <a:fld id="{A2B6AD91-4B23-4744-80DD-8D3955A9F328}" type="datetimeFigureOut">
               <a:rPr lang="en-US" smtClean="0"/>
-              <a:t>3/13/26</a:t>
+              <a:t>3/14/26</a:t>
             </a:fld>
             <a:endParaRPr lang="en-US"/>
           </a:p>
@@ -2308,7 +2308,7 @@
           <a:p>
             <a:fld id="{A2B6AD91-4B23-4744-80DD-8D3955A9F328}" type="datetimeFigureOut">
               <a:rPr lang="en-US" smtClean="0"/>
-              <a:t>3/13/26</a:t>
+              <a:t>3/14/26</a:t>
             </a:fld>
             <a:endParaRPr lang="en-US"/>
           </a:p>
@@ -2585,7 +2585,7 @@
           <a:p>
             <a:fld id="{A2B6AD91-4B23-4744-80DD-8D3955A9F328}" type="datetimeFigureOut">
               <a:rPr lang="en-US" smtClean="0"/>
-              <a:t>3/13/26</a:t>
+              <a:t>3/14/26</a:t>
             </a:fld>
             <a:endParaRPr lang="en-US"/>
           </a:p>
@@ -2842,7 +2842,7 @@
           <a:p>
             <a:fld id="{A2B6AD91-4B23-4744-80DD-8D3955A9F328}" type="datetimeFigureOut">
               <a:rPr lang="en-US" smtClean="0"/>
-              <a:t>3/13/26</a:t>
+              <a:t>3/14/26</a:t>
             </a:fld>
             <a:endParaRPr lang="en-US"/>
           </a:p>
@@ -3055,7 +3055,7 @@
           <a:p>
             <a:fld id="{A2B6AD91-4B23-4744-80DD-8D3955A9F328}" type="datetimeFigureOut">
               <a:rPr lang="en-US" smtClean="0"/>
-              <a:t>3/13/26</a:t>
+              <a:t>3/14/26</a:t>
             </a:fld>
             <a:endParaRPr lang="en-US"/>
           </a:p>
@@ -3488,12 +3488,15 @@
           </a:prstGeom>
           <a:solidFill>
             <a:schemeClr val="bg1">
-              <a:lumMod val="75000"/>
+              <a:lumMod val="95000"/>
+              <a:alpha val="95000"/>
             </a:schemeClr>
           </a:solidFill>
           <a:ln w="25400" cap="flat" cmpd="sng" algn="ctr">
             <a:solidFill>
-              <a:schemeClr val="tx1"/>
+              <a:schemeClr val="bg1">
+                <a:lumMod val="75000"/>
+              </a:schemeClr>
             </a:solidFill>
             <a:prstDash val="dash"/>
             <a:miter lim="800000"/>
@@ -3507,7 +3510,7 @@
           <a:lstStyle/>
           <a:p>
             <a:pPr algn="ctr"/>
-            <a:endParaRPr lang="en-US" sz="3600" dirty="0">
+            <a:endParaRPr lang="en-US" dirty="0">
               <a:solidFill>
                 <a:prstClr val="black"/>
               </a:solidFill>
@@ -3745,7 +3748,7 @@
                       <a:srgbClr val="271F17"/>
                     </a:solidFill>
                   </a:rPr>
-                  <a:t>computation</a:t>
+                  <a:t> computation</a:t>
                 </a:r>
                 <a:endParaRPr lang="en-US" sz="1600" dirty="0">
                   <a:solidFill>
@@ -3825,16 +3828,7 @@
                           </a:solidFill>
                           <a:latin typeface="Cambria Math" panose="02040503050406030204" pitchFamily="18" charset="0"/>
                         </a:rPr>
-                        <m:t>𝐸</m:t>
-                      </m:r>
-                      <m:r>
-                        <a:rPr lang="en-US" sz="1600" i="1" dirty="0">
-                          <a:solidFill>
-                            <a:schemeClr val="tx1"/>
-                          </a:solidFill>
-                          <a:latin typeface="Cambria Math" panose="02040503050406030204" pitchFamily="18" charset="0"/>
-                        </a:rPr>
-                        <m:t>𝑂</m:t>
+                        <m:t>𝐸𝑂</m:t>
                       </m:r>
                       <m:sSub>
                         <m:sSubPr>
@@ -4300,8 +4294,8 @@
           </p:sp>
         </mc:Fallback>
       </mc:AlternateContent>
-      <mc:AlternateContent xmlns:mc="http://schemas.openxmlformats.org/markup-compatibility/2006">
-        <mc:Choice xmlns:a14="http://schemas.microsoft.com/office/drawing/2010/main" Requires="a14">
+      <mc:AlternateContent xmlns:mc="http://schemas.openxmlformats.org/markup-compatibility/2006" xmlns:a14="http://schemas.microsoft.com/office/drawing/2010/main">
+        <mc:Choice Requires="a14">
           <p:sp>
             <p:nvSpPr>
               <p:cNvPr id="31" name="TextBox 30">
@@ -4413,7 +4407,7 @@
             </p:txBody>
           </p:sp>
         </mc:Choice>
-        <mc:Fallback>
+        <mc:Fallback xmlns="">
           <p:sp>
             <p:nvSpPr>
               <p:cNvPr id="31" name="TextBox 30">
@@ -4515,12 +4509,15 @@
           </a:prstGeom>
           <a:solidFill>
             <a:schemeClr val="bg1">
-              <a:lumMod val="75000"/>
+              <a:lumMod val="95000"/>
+              <a:alpha val="95000"/>
             </a:schemeClr>
           </a:solidFill>
           <a:ln w="25400" cap="flat" cmpd="sng" algn="ctr">
             <a:solidFill>
-              <a:schemeClr val="tx1"/>
+              <a:schemeClr val="bg1">
+                <a:lumMod val="75000"/>
+              </a:schemeClr>
             </a:solidFill>
             <a:prstDash val="dash"/>
             <a:miter lim="800000"/>
@@ -4534,7 +4531,7 @@
           <a:lstStyle/>
           <a:p>
             <a:pPr algn="ctr"/>
-            <a:endParaRPr lang="en-US" sz="3600" dirty="0">
+            <a:endParaRPr lang="en-US" dirty="0">
               <a:solidFill>
                 <a:prstClr val="black"/>
               </a:solidFill>
@@ -4590,7 +4587,11 @@
               <a:bodyPr rtlCol="0" anchor="ctr"/>
               <a:lstStyle/>
               <a:p>
-                <a:pPr algn="ctr"/>
+                <a:pPr algn="ctr">
+                  <a:spcAft>
+                    <a:spcPts val="600"/>
+                  </a:spcAft>
+                </a:pPr>
                 <a:r>
                   <a:rPr lang="en-US" sz="1600" dirty="0">
                     <a:solidFill>
@@ -4611,7 +4612,7 @@
                       <m:sSubSup>
                         <m:sSubSupPr>
                           <m:ctrlPr>
-                            <a:rPr lang="en-US" sz="1600" i="1" dirty="0">
+                            <a:rPr lang="en-US" sz="1400" i="1" dirty="0">
                               <a:solidFill>
                                 <a:schemeClr val="tx1"/>
                               </a:solidFill>
@@ -4624,7 +4625,7 @@
                             <m:accPr>
                               <m:chr m:val="̃"/>
                               <m:ctrlPr>
-                                <a:rPr lang="en-US" sz="1600" i="1" dirty="0">
+                                <a:rPr lang="en-US" sz="1400" i="1" dirty="0">
                                   <a:solidFill>
                                     <a:schemeClr val="tx1"/>
                                   </a:solidFill>
@@ -4634,7 +4635,7 @@
                             </m:accPr>
                             <m:e>
                               <m:r>
-                                <a:rPr lang="en-US" sz="1600" i="1" dirty="0">
+                                <a:rPr lang="en-US" sz="1400" i="1" dirty="0">
                                   <a:solidFill>
                                     <a:schemeClr val="tx1"/>
                                   </a:solidFill>
@@ -4647,7 +4648,7 @@
                         </m:e>
                         <m:sub>
                           <m:r>
-                            <a:rPr lang="en-US" sz="1600" i="1" dirty="0">
+                            <a:rPr lang="en-US" sz="1400" i="1" dirty="0">
                               <a:solidFill>
                                 <a:schemeClr val="tx1"/>
                               </a:solidFill>
@@ -4658,7 +4659,7 @@
                         </m:sub>
                         <m:sup>
                           <m:r>
-                            <a:rPr lang="en-US" sz="1600" i="1" dirty="0">
+                            <a:rPr lang="en-US" sz="1400" i="1" dirty="0">
                               <a:solidFill>
                                 <a:schemeClr val="tx1"/>
                               </a:solidFill>
@@ -4667,7 +4668,7 @@
                             <m:t>(</m:t>
                           </m:r>
                           <m:r>
-                            <a:rPr lang="en-US" sz="1600" i="1" dirty="0">
+                            <a:rPr lang="en-US" sz="1400" i="1" dirty="0">
                               <a:solidFill>
                                 <a:schemeClr val="tx1"/>
                               </a:solidFill>
@@ -4676,7 +4677,7 @@
                             <m:t>𝑖</m:t>
                           </m:r>
                           <m:r>
-                            <a:rPr lang="en-US" sz="1600" i="1" dirty="0">
+                            <a:rPr lang="en-US" sz="1400" i="1" dirty="0">
                               <a:solidFill>
                                 <a:schemeClr val="tx1"/>
                               </a:solidFill>
@@ -4687,7 +4688,7 @@
                         </m:sup>
                       </m:sSubSup>
                       <m:r>
-                        <a:rPr lang="en-US" sz="1600" i="1" dirty="0">
+                        <a:rPr lang="en-US" sz="1400" i="1" dirty="0">
                           <a:solidFill>
                             <a:schemeClr val="tx1"/>
                           </a:solidFill>
@@ -4697,7 +4698,7 @@
                         <m:t>~</m:t>
                       </m:r>
                       <m:r>
-                        <a:rPr lang="en-US" sz="1600" i="1" dirty="0">
+                        <a:rPr lang="en-US" sz="1400" i="1" dirty="0">
                           <a:solidFill>
                             <a:schemeClr val="tx1"/>
                           </a:solidFill>
@@ -4709,7 +4710,7 @@
                       <m:d>
                         <m:dPr>
                           <m:ctrlPr>
-                            <a:rPr lang="en-US" sz="1600" i="1" dirty="0">
+                            <a:rPr lang="en-US" sz="1400" i="1" dirty="0">
                               <a:solidFill>
                                 <a:schemeClr val="tx1"/>
                               </a:solidFill>
@@ -4722,7 +4723,7 @@
                           <m:sSubSup>
                             <m:sSubSupPr>
                               <m:ctrlPr>
-                                <a:rPr lang="en-US" sz="1600" i="1" dirty="0">
+                                <a:rPr lang="en-US" sz="1400" i="1" dirty="0">
                                   <a:solidFill>
                                     <a:schemeClr val="tx1"/>
                                   </a:solidFill>
@@ -4732,7 +4733,7 @@
                             </m:sSubSupPr>
                             <m:e>
                               <m:r>
-                                <a:rPr lang="en-US" sz="1600" i="1" dirty="0">
+                                <a:rPr lang="en-US" sz="1400" i="1" dirty="0">
                                   <a:solidFill>
                                     <a:schemeClr val="tx1"/>
                                   </a:solidFill>
@@ -4743,7 +4744,7 @@
                             </m:e>
                             <m:sub>
                               <m:r>
-                                <a:rPr lang="en-US" sz="1600" i="1" dirty="0">
+                                <a:rPr lang="en-US" sz="1400" i="1" dirty="0">
                                   <a:solidFill>
                                     <a:schemeClr val="tx1"/>
                                   </a:solidFill>
@@ -4752,7 +4753,7 @@
                                 <m:t>𝑛</m:t>
                               </m:r>
                               <m:r>
-                                <a:rPr lang="en-US" sz="1600" i="1" dirty="0">
+                                <a:rPr lang="en-US" sz="1400" i="1" dirty="0">
                                   <a:solidFill>
                                     <a:schemeClr val="tx1"/>
                                   </a:solidFill>
@@ -4763,7 +4764,7 @@
                             </m:sub>
                             <m:sup>
                               <m:r>
-                                <a:rPr lang="en-US" sz="1600" i="1" dirty="0">
+                                <a:rPr lang="en-US" sz="1400" i="1" dirty="0">
                                   <a:solidFill>
                                     <a:schemeClr val="tx1"/>
                                   </a:solidFill>
@@ -4772,7 +4773,7 @@
                                 <m:t>(</m:t>
                               </m:r>
                               <m:r>
-                                <a:rPr lang="en-US" sz="1600" i="1" dirty="0">
+                                <a:rPr lang="en-US" sz="1400" i="1" dirty="0">
                                   <a:solidFill>
                                     <a:schemeClr val="tx1"/>
                                   </a:solidFill>
@@ -4781,7 +4782,7 @@
                                 <m:t>𝑖</m:t>
                               </m:r>
                               <m:r>
-                                <a:rPr lang="en-US" sz="1600" i="1" dirty="0">
+                                <a:rPr lang="en-US" sz="1400" i="1" dirty="0">
                                   <a:solidFill>
                                     <a:schemeClr val="tx1"/>
                                   </a:solidFill>
@@ -4792,7 +4793,7 @@
                             </m:sup>
                           </m:sSubSup>
                           <m:r>
-                            <a:rPr lang="en-US" sz="1600" i="1" dirty="0">
+                            <a:rPr lang="en-US" sz="1400" i="1" dirty="0">
                               <a:solidFill>
                                 <a:schemeClr val="tx1"/>
                               </a:solidFill>
@@ -4803,7 +4804,7 @@
                           <m:sSub>
                             <m:sSubPr>
                               <m:ctrlPr>
-                                <a:rPr lang="en-US" sz="1600" i="1" dirty="0">
+                                <a:rPr lang="en-US" sz="1400" i="1" dirty="0">
                                   <a:solidFill>
                                     <a:schemeClr val="tx1"/>
                                   </a:solidFill>
@@ -4817,7 +4818,7 @@
                                 <m:rPr>
                                   <m:sty m:val="p"/>
                                 </m:rPr>
-                                <a:rPr lang="el-GR" sz="1600" i="1" dirty="0">
+                                <a:rPr lang="el-GR" sz="1400" i="1" dirty="0">
                                   <a:solidFill>
                                     <a:schemeClr val="tx1"/>
                                   </a:solidFill>
@@ -4829,7 +4830,7 @@
                             </m:e>
                             <m:sub>
                               <m:r>
-                                <a:rPr lang="en-US" sz="1600" i="1" dirty="0">
+                                <a:rPr lang="en-US" sz="1400" i="1" dirty="0">
                                   <a:solidFill>
                                     <a:schemeClr val="tx1"/>
                                   </a:solidFill>
@@ -4845,7 +4846,7 @@
                     </m:oMath>
                   </m:oMathPara>
                 </a14:m>
-                <a:endParaRPr lang="en-US" sz="1600" dirty="0">
+                <a:endParaRPr lang="en-US" sz="1400" dirty="0">
                   <a:solidFill>
                     <a:schemeClr val="tx1"/>
                   </a:solidFill>
@@ -4880,7 +4881,7 @@
               <a:blipFill>
                 <a:blip r:embed="rId5"/>
                 <a:stretch>
-                  <a:fillRect t="-1754"/>
+                  <a:fillRect t="-3509"/>
                 </a:stretch>
               </a:blipFill>
             </p:spPr>
@@ -4916,7 +4917,7 @@
             <p:spPr>
               <a:xfrm>
                 <a:off x="1514765" y="2058450"/>
-                <a:ext cx="3268608" cy="872779"/>
+                <a:ext cx="3268608" cy="851351"/>
               </a:xfrm>
               <a:prstGeom prst="rect">
                 <a:avLst/>
@@ -5538,7 +5539,7 @@
             <p:spPr>
               <a:xfrm>
                 <a:off x="1514765" y="2058450"/>
-                <a:ext cx="3268608" cy="872779"/>
+                <a:ext cx="3268608" cy="851351"/>
               </a:xfrm>
               <a:prstGeom prst="rect">
                 <a:avLst/>
@@ -5613,7 +5614,11 @@
               <a:bodyPr rtlCol="0" anchor="ctr"/>
               <a:lstStyle/>
               <a:p>
-                <a:pPr algn="ctr"/>
+                <a:pPr algn="ctr">
+                  <a:spcAft>
+                    <a:spcPts val="600"/>
+                  </a:spcAft>
+                </a:pPr>
                 <a:r>
                   <a:rPr lang="en-US" sz="1600" dirty="0">
                     <a:solidFill>
@@ -5634,7 +5639,7 @@
                       <m:sSubSup>
                         <m:sSubSupPr>
                           <m:ctrlPr>
-                            <a:rPr lang="en-US" sz="1600" i="1" dirty="0">
+                            <a:rPr lang="en-US" sz="1400" i="1" dirty="0">
                               <a:solidFill>
                                 <a:schemeClr val="tx1"/>
                               </a:solidFill>
@@ -5644,7 +5649,7 @@
                         </m:sSubSupPr>
                         <m:e>
                           <m:r>
-                            <a:rPr lang="en-US" sz="1600" i="1" dirty="0">
+                            <a:rPr lang="en-US" sz="1400" i="1" dirty="0">
                               <a:solidFill>
                                 <a:schemeClr val="tx1"/>
                               </a:solidFill>
@@ -5655,7 +5660,7 @@
                         </m:e>
                         <m:sub>
                           <m:r>
-                            <a:rPr lang="en-US" sz="1600" i="1" dirty="0">
+                            <a:rPr lang="en-US" sz="1400" i="1" dirty="0">
                               <a:solidFill>
                                 <a:schemeClr val="tx1"/>
                               </a:solidFill>
@@ -5666,7 +5671,7 @@
                         </m:sub>
                         <m:sup>
                           <m:r>
-                            <a:rPr lang="en-US" sz="1600" i="1" dirty="0">
+                            <a:rPr lang="en-US" sz="1400" i="1" dirty="0">
                               <a:solidFill>
                                 <a:schemeClr val="tx1"/>
                               </a:solidFill>
@@ -5675,7 +5680,7 @@
                             <m:t>(</m:t>
                           </m:r>
                           <m:r>
-                            <a:rPr lang="en-US" sz="1600" i="1" dirty="0">
+                            <a:rPr lang="en-US" sz="1400" i="1" dirty="0">
                               <a:solidFill>
                                 <a:schemeClr val="tx1"/>
                               </a:solidFill>
@@ -5684,7 +5689,7 @@
                             <m:t>𝑖</m:t>
                           </m:r>
                           <m:r>
-                            <a:rPr lang="en-US" sz="1600" i="1" dirty="0">
+                            <a:rPr lang="en-US" sz="1400" i="1" dirty="0">
                               <a:solidFill>
                                 <a:schemeClr val="tx1"/>
                               </a:solidFill>
@@ -5695,7 +5700,7 @@
                         </m:sup>
                       </m:sSubSup>
                       <m:r>
-                        <a:rPr lang="en-US" sz="1600" i="1" dirty="0">
+                        <a:rPr lang="en-US" sz="1400" i="1" dirty="0">
                           <a:solidFill>
                             <a:schemeClr val="tx1"/>
                           </a:solidFill>
@@ -5707,7 +5712,7 @@
                         <m:naryPr>
                           <m:chr m:val="∑"/>
                           <m:ctrlPr>
-                            <a:rPr lang="en-US" sz="1600" i="1" dirty="0">
+                            <a:rPr lang="en-US" sz="1400" i="1" dirty="0">
                               <a:solidFill>
                                 <a:schemeClr val="tx1"/>
                               </a:solidFill>
@@ -5720,7 +5725,7 @@
                             <m:rPr>
                               <m:brk m:alnAt="23"/>
                             </m:rPr>
-                            <a:rPr lang="en-US" sz="1600" i="1" dirty="0">
+                            <a:rPr lang="en-US" sz="1400" i="1" dirty="0">
                               <a:solidFill>
                                 <a:schemeClr val="tx1"/>
                               </a:solidFill>
@@ -5729,7 +5734,7 @@
                             <m:t>𝑖</m:t>
                           </m:r>
                           <m:r>
-                            <a:rPr lang="en-US" sz="1600" i="1" dirty="0">
+                            <a:rPr lang="en-US" sz="1400" i="1" dirty="0">
                               <a:solidFill>
                                 <a:schemeClr val="tx1"/>
                               </a:solidFill>
@@ -5740,7 +5745,7 @@
                         </m:sub>
                         <m:sup>
                           <m:r>
-                            <a:rPr lang="en-US" sz="1600" i="1" dirty="0">
+                            <a:rPr lang="en-US" sz="1400" i="1" dirty="0">
                               <a:solidFill>
                                 <a:schemeClr val="tx1"/>
                               </a:solidFill>
@@ -5753,7 +5758,7 @@
                           <m:sSubSup>
                             <m:sSubSupPr>
                               <m:ctrlPr>
-                                <a:rPr lang="en-US" sz="1600" i="1" dirty="0">
+                                <a:rPr lang="en-US" sz="1400" i="1" dirty="0">
                                   <a:solidFill>
                                     <a:schemeClr val="tx1"/>
                                   </a:solidFill>
@@ -5763,7 +5768,7 @@
                             </m:sSubSupPr>
                             <m:e>
                               <m:r>
-                                <a:rPr lang="en-US" sz="1600" i="1" dirty="0">
+                                <a:rPr lang="en-US" sz="1400" i="1" dirty="0">
                                   <a:solidFill>
                                     <a:schemeClr val="tx1"/>
                                   </a:solidFill>
@@ -5774,7 +5779,7 @@
                             </m:e>
                             <m:sub>
                               <m:r>
-                                <a:rPr lang="en-US" sz="1600" i="1" dirty="0">
+                                <a:rPr lang="en-US" sz="1400" i="1" dirty="0">
                                   <a:solidFill>
                                     <a:schemeClr val="tx1"/>
                                   </a:solidFill>
@@ -5787,7 +5792,7 @@
                               <m:d>
                                 <m:dPr>
                                   <m:ctrlPr>
-                                    <a:rPr lang="en-US" sz="1600" i="1" dirty="0">
+                                    <a:rPr lang="en-US" sz="1400" i="1" dirty="0">
                                       <a:solidFill>
                                         <a:schemeClr val="tx1"/>
                                       </a:solidFill>
@@ -5797,7 +5802,7 @@
                                 </m:dPr>
                                 <m:e>
                                   <m:r>
-                                    <a:rPr lang="en-US" sz="1600" i="1" dirty="0">
+                                    <a:rPr lang="en-US" sz="1400" i="1" dirty="0">
                                       <a:solidFill>
                                         <a:schemeClr val="tx1"/>
                                       </a:solidFill>
@@ -5814,7 +5819,7 @@
                       <m:sSub>
                         <m:sSubPr>
                           <m:ctrlPr>
-                            <a:rPr lang="en-US" sz="1600" i="1" dirty="0">
+                            <a:rPr lang="en-US" sz="1400" i="1" dirty="0">
                               <a:solidFill>
                                 <a:schemeClr val="tx1"/>
                               </a:solidFill>
@@ -5824,7 +5829,7 @@
                         </m:sSubPr>
                         <m:e>
                           <m:r>
-                            <a:rPr lang="en-US" sz="1600" i="1" dirty="0">
+                            <a:rPr lang="en-US" sz="1400" i="1" dirty="0">
                               <a:solidFill>
                                 <a:schemeClr val="tx1"/>
                               </a:solidFill>
@@ -5837,7 +5842,7 @@
                           <m:sSubSup>
                             <m:sSubSupPr>
                               <m:ctrlPr>
-                                <a:rPr lang="en-US" sz="1600" i="1" dirty="0">
+                                <a:rPr lang="en-US" sz="1400" i="1" dirty="0">
                                   <a:solidFill>
                                     <a:schemeClr val="tx1"/>
                                   </a:solidFill>
@@ -5850,7 +5855,7 @@
                                 <m:accPr>
                                   <m:chr m:val="̃"/>
                                   <m:ctrlPr>
-                                    <a:rPr lang="en-US" sz="1600" i="1" dirty="0">
+                                    <a:rPr lang="en-US" sz="1400" i="1" dirty="0">
                                       <a:solidFill>
                                         <a:schemeClr val="tx1"/>
                                       </a:solidFill>
@@ -5860,7 +5865,7 @@
                                 </m:accPr>
                                 <m:e>
                                   <m:r>
-                                    <a:rPr lang="en-US" sz="1600" i="1" dirty="0">
+                                    <a:rPr lang="en-US" sz="1400" i="1" dirty="0">
                                       <a:solidFill>
                                         <a:schemeClr val="tx1"/>
                                       </a:solidFill>
@@ -5873,7 +5878,7 @@
                             </m:e>
                             <m:sub>
                               <m:r>
-                                <a:rPr lang="en-US" sz="1600" i="1" dirty="0">
+                                <a:rPr lang="en-US" sz="1400" i="1" dirty="0">
                                   <a:solidFill>
                                     <a:schemeClr val="tx1"/>
                                   </a:solidFill>
@@ -5884,7 +5889,7 @@
                             </m:sub>
                             <m:sup>
                               <m:r>
-                                <a:rPr lang="en-US" sz="1600" i="1" dirty="0">
+                                <a:rPr lang="en-US" sz="1400" i="1" dirty="0">
                                   <a:solidFill>
                                     <a:schemeClr val="tx1"/>
                                   </a:solidFill>
@@ -5893,7 +5898,7 @@
                                 <m:t>(</m:t>
                               </m:r>
                               <m:r>
-                                <a:rPr lang="en-US" sz="1600" i="1" dirty="0">
+                                <a:rPr lang="en-US" sz="1400" i="1" dirty="0">
                                   <a:solidFill>
                                     <a:schemeClr val="tx1"/>
                                   </a:solidFill>
@@ -5902,7 +5907,7 @@
                                 <m:t>𝑖</m:t>
                               </m:r>
                               <m:r>
-                                <a:rPr lang="en-US" sz="1600" i="1" dirty="0">
+                                <a:rPr lang="en-US" sz="1400" i="1" dirty="0">
                                   <a:solidFill>
                                     <a:schemeClr val="tx1"/>
                                   </a:solidFill>
@@ -5952,7 +5957,7 @@
               <a:blipFill>
                 <a:blip r:embed="rId7"/>
                 <a:stretch>
-                  <a:fillRect t="-48193" b="-115663"/>
+                  <a:fillRect t="-28916" b="-100000"/>
                 </a:stretch>
               </a:blipFill>
             </p:spPr>
@@ -5989,8 +5994,8 @@
         </p:nvCxnSpPr>
         <p:spPr>
           <a:xfrm>
-            <a:off x="3149069" y="2931229"/>
-            <a:ext cx="0" cy="227851"/>
+            <a:off x="3149069" y="2909801"/>
+            <a:ext cx="0" cy="249279"/>
           </a:xfrm>
           <a:prstGeom prst="straightConnector1">
             <a:avLst/>
@@ -6079,8 +6084,8 @@
             </p:nvSpPr>
             <p:spPr>
               <a:xfrm>
-                <a:off x="7000517" y="883431"/>
-                <a:ext cx="4399547" cy="1847634"/>
+                <a:off x="7001084" y="955111"/>
+                <a:ext cx="4399547" cy="1651594"/>
               </a:xfrm>
               <a:prstGeom prst="rect">
                 <a:avLst/>
@@ -6111,7 +6116,11 @@
               <a:bodyPr rtlCol="0" anchor="ctr"/>
               <a:lstStyle/>
               <a:p>
-                <a:pPr algn="ctr"/>
+                <a:pPr algn="ctr">
+                  <a:spcBef>
+                    <a:spcPts val="600"/>
+                  </a:spcBef>
+                </a:pPr>
                 <a:r>
                   <a:rPr lang="en-US" sz="1600" dirty="0">
                     <a:solidFill>
@@ -6130,7 +6139,7 @@
                     </m:oMathParaPr>
                     <m:oMath xmlns:m="http://schemas.openxmlformats.org/officeDocument/2006/math">
                       <m:r>
-                        <a:rPr lang="en-US" sz="1600" i="1" dirty="0">
+                        <a:rPr lang="en-US" sz="1400" i="1" dirty="0">
                           <a:solidFill>
                             <a:schemeClr val="tx1"/>
                           </a:solidFill>
@@ -6142,7 +6151,7 @@
                         <m:dPr>
                           <m:endChr m:val="|"/>
                           <m:ctrlPr>
-                            <a:rPr lang="en-US" sz="1600" i="1" dirty="0">
+                            <a:rPr lang="en-US" sz="1400" i="1" dirty="0">
                               <a:solidFill>
                                 <a:schemeClr val="tx1"/>
                               </a:solidFill>
@@ -6154,7 +6163,7 @@
                           <m:sSub>
                             <m:sSubPr>
                               <m:ctrlPr>
-                                <a:rPr lang="en-US" sz="1600" i="1" dirty="0">
+                                <a:rPr lang="en-US" sz="1400" i="1" dirty="0">
                                   <a:solidFill>
                                     <a:schemeClr val="tx1"/>
                                   </a:solidFill>
@@ -6164,7 +6173,7 @@
                             </m:sSubPr>
                             <m:e>
                               <m:r>
-                                <a:rPr lang="en-US" sz="1600" i="1" dirty="0">
+                                <a:rPr lang="en-US" sz="1400" i="1" dirty="0">
                                   <a:solidFill>
                                     <a:schemeClr val="tx1"/>
                                   </a:solidFill>
@@ -6175,7 +6184,7 @@
                             </m:e>
                             <m:sub>
                               <m:r>
-                                <a:rPr lang="en-US" sz="1600" i="1" dirty="0">
+                                <a:rPr lang="en-US" sz="1400" i="1" dirty="0">
                                   <a:solidFill>
                                     <a:schemeClr val="tx1"/>
                                   </a:solidFill>
@@ -6186,7 +6195,7 @@
                             </m:sub>
                           </m:sSub>
                           <m:r>
-                            <a:rPr lang="en-US" sz="1600" i="1" dirty="0">
+                            <a:rPr lang="en-US" sz="1400" i="1" dirty="0">
                               <a:solidFill>
                                 <a:schemeClr val="tx1"/>
                               </a:solidFill>
@@ -6195,7 +6204,7 @@
                             <m:t>=</m:t>
                           </m:r>
                           <m:r>
-                            <a:rPr lang="en-US" sz="1600" i="1" dirty="0">
+                            <a:rPr lang="en-US" sz="1400" i="1" dirty="0">
                               <a:solidFill>
                                 <a:schemeClr val="tx1"/>
                               </a:solidFill>
@@ -6208,7 +6217,7 @@
                       <m:sSub>
                         <m:sSubPr>
                           <m:ctrlPr>
-                            <a:rPr lang="en-US" sz="1600" i="1" dirty="0">
+                            <a:rPr lang="en-US" sz="1400" i="1" dirty="0">
                               <a:solidFill>
                                 <a:schemeClr val="tx1"/>
                               </a:solidFill>
@@ -6218,7 +6227,7 @@
                         </m:sSubPr>
                         <m:e>
                           <m:r>
-                            <a:rPr lang="en-US" sz="1600" i="1" dirty="0">
+                            <a:rPr lang="en-US" sz="1400" i="1" dirty="0">
                               <a:solidFill>
                                 <a:schemeClr val="tx1"/>
                               </a:solidFill>
@@ -6231,7 +6240,7 @@
                           <m:sSub>
                             <m:sSubPr>
                               <m:ctrlPr>
-                                <a:rPr lang="en-US" sz="1600" i="1" dirty="0">
+                                <a:rPr lang="en-US" sz="1400" i="1" dirty="0">
                                   <a:solidFill>
                                     <a:schemeClr val="tx1"/>
                                   </a:solidFill>
@@ -6241,7 +6250,7 @@
                             </m:sSubPr>
                             <m:e>
                               <m:r>
-                                <a:rPr lang="en-US" sz="1600" i="1" dirty="0">
+                                <a:rPr lang="en-US" sz="1400" i="1" dirty="0">
                                   <a:solidFill>
                                     <a:schemeClr val="tx1"/>
                                   </a:solidFill>
@@ -6252,25 +6261,16 @@
                             </m:e>
                             <m:sub>
                               <m:r>
-                                <a:rPr lang="en-US" sz="1600" i="1" dirty="0">
+                                <a:rPr lang="en-US" sz="1400" i="1" dirty="0">
                                   <a:solidFill>
                                     <a:schemeClr val="tx1"/>
                                   </a:solidFill>
                                   <a:latin typeface="Cambria Math" panose="02040503050406030204" pitchFamily="18" charset="0"/>
                                 </a:rPr>
-                                <m:t>0</m:t>
+                                <m:t>0:</m:t>
                               </m:r>
                               <m:r>
-                                <a:rPr lang="en-US" sz="1600" i="1" dirty="0">
-                                  <a:solidFill>
-                                    <a:schemeClr val="tx1"/>
-                                  </a:solidFill>
-                                  <a:latin typeface="Cambria Math" panose="02040503050406030204" pitchFamily="18" charset="0"/>
-                                </a:rPr>
-                                <m:t>:</m:t>
-                              </m:r>
-                              <m:r>
-                                <a:rPr lang="en-US" sz="1600" i="1" dirty="0">
+                                <a:rPr lang="en-US" sz="1400" i="1" dirty="0">
                                   <a:solidFill>
                                     <a:schemeClr val="tx1"/>
                                   </a:solidFill>
@@ -6283,7 +6283,7 @@
                         </m:sub>
                       </m:sSub>
                       <m:r>
-                        <a:rPr lang="en-US" sz="1600" i="1" dirty="0">
+                        <a:rPr lang="en-US" sz="1400" i="1" dirty="0">
                           <a:solidFill>
                             <a:schemeClr val="tx1"/>
                           </a:solidFill>
@@ -6294,7 +6294,7 @@
                       <m:sSub>
                         <m:sSubPr>
                           <m:ctrlPr>
-                            <a:rPr lang="en-US" sz="1600" i="1" dirty="0">
+                            <a:rPr lang="en-US" sz="1400" i="1" dirty="0">
                               <a:solidFill>
                                 <a:schemeClr val="tx1"/>
                               </a:solidFill>
@@ -6304,7 +6304,7 @@
                         </m:sSubPr>
                         <m:e>
                           <m:r>
-                            <a:rPr lang="en-US" sz="1600" i="1" dirty="0">
+                            <a:rPr lang="en-US" sz="1400" i="1" dirty="0">
                               <a:solidFill>
                                 <a:schemeClr val="tx1"/>
                               </a:solidFill>
@@ -6315,7 +6315,7 @@
                         </m:e>
                         <m:sub>
                           <m:r>
-                            <a:rPr lang="en-US" sz="1600" i="1" dirty="0">
+                            <a:rPr lang="en-US" sz="1400" i="1" dirty="0">
                               <a:solidFill>
                                 <a:schemeClr val="tx1"/>
                               </a:solidFill>
@@ -6324,7 +6324,7 @@
                             <m:t>0:</m:t>
                           </m:r>
                           <m:r>
-                            <a:rPr lang="en-US" sz="1600" i="1" dirty="0">
+                            <a:rPr lang="en-US" sz="1400" i="1" dirty="0">
                               <a:solidFill>
                                 <a:schemeClr val="tx1"/>
                               </a:solidFill>
@@ -6335,7 +6335,7 @@
                         </m:sub>
                       </m:sSub>
                       <m:r>
-                        <a:rPr lang="en-US" sz="1600" i="1" dirty="0">
+                        <a:rPr lang="en-US" sz="1400" i="1" dirty="0">
                           <a:solidFill>
                             <a:schemeClr val="tx1"/>
                           </a:solidFill>
@@ -6344,7 +6344,7 @@
                         <m:t>)</m:t>
                       </m:r>
                       <m:r>
-                        <a:rPr lang="en-US" sz="1600" i="1" dirty="0">
+                        <a:rPr lang="en-US" sz="1400" i="1" dirty="0">
                           <a:solidFill>
                             <a:schemeClr val="tx1"/>
                           </a:solidFill>
@@ -6354,7 +6354,7 @@
                         <m:t>≈</m:t>
                       </m:r>
                       <m:r>
-                        <a:rPr lang="en-US" sz="1600" i="1" dirty="0">
+                        <a:rPr lang="en-US" sz="1400" i="1" dirty="0">
                           <a:solidFill>
                             <a:schemeClr val="tx1"/>
                           </a:solidFill>
@@ -6366,7 +6366,7 @@
                         <m:naryPr>
                           <m:chr m:val="∑"/>
                           <m:ctrlPr>
-                            <a:rPr lang="en-US" sz="1600" i="1" dirty="0">
+                            <a:rPr lang="en-US" sz="1400" i="1" dirty="0">
                               <a:solidFill>
                                 <a:schemeClr val="tx1"/>
                               </a:solidFill>
@@ -6379,7 +6379,7 @@
                             <m:rPr>
                               <m:brk m:alnAt="23"/>
                             </m:rPr>
-                            <a:rPr lang="en-US" sz="1600" i="1" dirty="0">
+                            <a:rPr lang="en-US" sz="1400" i="1" dirty="0">
                               <a:solidFill>
                                 <a:schemeClr val="tx1"/>
                               </a:solidFill>
@@ -6388,7 +6388,7 @@
                             <m:t>𝑖</m:t>
                           </m:r>
                           <m:r>
-                            <a:rPr lang="en-US" sz="1600" i="1" dirty="0">
+                            <a:rPr lang="en-US" sz="1400" i="1" dirty="0">
                               <a:solidFill>
                                 <a:schemeClr val="tx1"/>
                               </a:solidFill>
@@ -6399,7 +6399,7 @@
                         </m:sub>
                         <m:sup>
                           <m:r>
-                            <a:rPr lang="en-US" sz="1600" i="1" dirty="0">
+                            <a:rPr lang="en-US" sz="1400" i="1" dirty="0">
                               <a:solidFill>
                                 <a:schemeClr val="tx1"/>
                               </a:solidFill>
@@ -6412,7 +6412,7 @@
                           <m:sSubSup>
                             <m:sSubSupPr>
                               <m:ctrlPr>
-                                <a:rPr lang="en-US" sz="1600" i="1" dirty="0">
+                                <a:rPr lang="en-US" sz="1400" i="1" dirty="0">
                                   <a:solidFill>
                                     <a:schemeClr val="tx1"/>
                                   </a:solidFill>
@@ -6422,7 +6422,7 @@
                             </m:sSubSupPr>
                             <m:e>
                               <m:r>
-                                <a:rPr lang="en-US" sz="1600" i="1" dirty="0">
+                                <a:rPr lang="en-US" sz="1400" i="1" dirty="0">
                                   <a:solidFill>
                                     <a:schemeClr val="tx1"/>
                                   </a:solidFill>
@@ -6433,7 +6433,7 @@
                             </m:e>
                             <m:sub>
                               <m:r>
-                                <a:rPr lang="en-US" sz="1600" i="1" dirty="0">
+                                <a:rPr lang="en-US" sz="1400" i="1" dirty="0">
                                   <a:solidFill>
                                     <a:schemeClr val="tx1"/>
                                   </a:solidFill>
@@ -6446,7 +6446,7 @@
                               <m:d>
                                 <m:dPr>
                                   <m:ctrlPr>
-                                    <a:rPr lang="en-US" sz="1600" i="1" dirty="0">
+                                    <a:rPr lang="en-US" sz="1400" i="1" dirty="0">
                                       <a:solidFill>
                                         <a:schemeClr val="tx1"/>
                                       </a:solidFill>
@@ -6456,7 +6456,7 @@
                                 </m:dPr>
                                 <m:e>
                                   <m:r>
-                                    <a:rPr lang="en-US" sz="1600" i="1" dirty="0">
+                                    <a:rPr lang="en-US" sz="1400" i="1" dirty="0">
                                       <a:solidFill>
                                         <a:schemeClr val="tx1"/>
                                       </a:solidFill>
@@ -6469,7 +6469,7 @@
                             </m:sup>
                           </m:sSubSup>
                           <m:r>
-                            <a:rPr lang="en-US" sz="1600" i="1" dirty="0">
+                            <a:rPr lang="en-US" sz="1400" i="1" dirty="0">
                               <a:solidFill>
                                 <a:schemeClr val="tx1"/>
                               </a:solidFill>
@@ -6482,7 +6482,7 @@
                       <m:d>
                         <m:dPr>
                           <m:ctrlPr>
-                            <a:rPr lang="en-US" sz="1600" i="1" dirty="0">
+                            <a:rPr lang="en-US" sz="1400" i="1" dirty="0">
                               <a:solidFill>
                                 <a:schemeClr val="tx1"/>
                               </a:solidFill>
@@ -6494,7 +6494,7 @@
                           <m:sSub>
                             <m:sSubPr>
                               <m:ctrlPr>
-                                <a:rPr lang="en-US" sz="1600" i="1" dirty="0">
+                                <a:rPr lang="en-US" sz="1400" i="1" dirty="0">
                                   <a:solidFill>
                                     <a:schemeClr val="tx1"/>
                                   </a:solidFill>
@@ -6504,7 +6504,7 @@
                             </m:sSubPr>
                             <m:e>
                               <m:r>
-                                <a:rPr lang="en-US" sz="1600" i="1" dirty="0">
+                                <a:rPr lang="en-US" sz="1400" i="1" dirty="0">
                                   <a:solidFill>
                                     <a:schemeClr val="tx1"/>
                                   </a:solidFill>
@@ -6515,7 +6515,7 @@
                             </m:e>
                             <m:sub>
                               <m:r>
-                                <a:rPr lang="en-US" sz="1600" i="1" dirty="0">
+                                <a:rPr lang="en-US" sz="1400" i="1" dirty="0">
                                   <a:solidFill>
                                     <a:schemeClr val="tx1"/>
                                   </a:solidFill>
@@ -6526,7 +6526,7 @@
                             </m:sub>
                           </m:sSub>
                           <m:r>
-                            <a:rPr lang="en-US" sz="1600" i="1" dirty="0">
+                            <a:rPr lang="en-US" sz="1400" i="1" dirty="0">
                               <a:solidFill>
                                 <a:schemeClr val="tx1"/>
                               </a:solidFill>
@@ -6535,7 +6535,7 @@
                             <m:t>=</m:t>
                           </m:r>
                           <m:r>
-                            <a:rPr lang="en-US" sz="1600" i="1" dirty="0">
+                            <a:rPr lang="en-US" sz="1400" i="1" dirty="0">
                               <a:solidFill>
                                 <a:schemeClr val="tx1"/>
                               </a:solidFill>
@@ -6544,7 +6544,7 @@
                             <m:t>𝑡</m:t>
                           </m:r>
                           <m:r>
-                            <a:rPr lang="en-US" sz="1600" i="1" dirty="0">
+                            <a:rPr lang="en-US" sz="1400" i="1" dirty="0">
                               <a:solidFill>
                                 <a:schemeClr val="tx1"/>
                               </a:solidFill>
@@ -6555,7 +6555,7 @@
                           <m:sSubSup>
                             <m:sSubSupPr>
                               <m:ctrlPr>
-                                <a:rPr lang="en-US" sz="1600" i="1" dirty="0">
+                                <a:rPr lang="en-US" sz="1400" i="1" dirty="0">
                                   <a:solidFill>
                                     <a:schemeClr val="tx1"/>
                                   </a:solidFill>
@@ -6568,7 +6568,7 @@
                                 <m:accPr>
                                   <m:chr m:val="̃"/>
                                   <m:ctrlPr>
-                                    <a:rPr lang="en-US" sz="1600" i="1" dirty="0">
+                                    <a:rPr lang="en-US" sz="1400" i="1" dirty="0">
                                       <a:solidFill>
                                         <a:schemeClr val="tx1"/>
                                       </a:solidFill>
@@ -6578,7 +6578,7 @@
                                 </m:accPr>
                                 <m:e>
                                   <m:r>
-                                    <a:rPr lang="en-US" sz="1600" i="1" dirty="0">
+                                    <a:rPr lang="en-US" sz="1400" i="1" dirty="0">
                                       <a:solidFill>
                                         <a:schemeClr val="tx1"/>
                                       </a:solidFill>
@@ -6591,7 +6591,7 @@
                             </m:e>
                             <m:sub>
                               <m:r>
-                                <a:rPr lang="en-US" sz="1600" i="1" dirty="0">
+                                <a:rPr lang="en-US" sz="1400" i="1" dirty="0">
                                   <a:solidFill>
                                     <a:schemeClr val="tx1"/>
                                   </a:solidFill>
@@ -6604,7 +6604,7 @@
                               <m:d>
                                 <m:dPr>
                                   <m:ctrlPr>
-                                    <a:rPr lang="en-US" sz="1600" i="1" dirty="0">
+                                    <a:rPr lang="en-US" sz="1400" i="1" dirty="0">
                                       <a:solidFill>
                                         <a:schemeClr val="tx1"/>
                                       </a:solidFill>
@@ -6614,7 +6614,7 @@
                                 </m:dPr>
                                 <m:e>
                                   <m:r>
-                                    <a:rPr lang="en-US" sz="1600" i="1" dirty="0">
+                                    <a:rPr lang="en-US" sz="1400" i="1" dirty="0">
                                       <a:solidFill>
                                         <a:schemeClr val="tx1"/>
                                       </a:solidFill>
@@ -6631,7 +6631,7 @@
                     </m:oMath>
                   </m:oMathPara>
                 </a14:m>
-                <a:endParaRPr lang="en-US" sz="1600" dirty="0">
+                <a:endParaRPr lang="en-US" sz="1400" dirty="0">
                   <a:solidFill>
                     <a:schemeClr val="tx1"/>
                   </a:solidFill>
@@ -6646,7 +6646,7 @@
                     </m:oMathParaPr>
                     <m:oMath xmlns:m="http://schemas.openxmlformats.org/officeDocument/2006/math">
                       <m:r>
-                        <a:rPr lang="en-US" sz="1600" dirty="0">
+                        <a:rPr lang="en-US" sz="1400" dirty="0">
                           <a:solidFill>
                             <a:schemeClr val="tx1"/>
                           </a:solidFill>
@@ -6657,7 +6657,7 @@
                       <m:sSub>
                         <m:sSubPr>
                           <m:ctrlPr>
-                            <a:rPr lang="en-US" sz="1600" i="1" dirty="0">
+                            <a:rPr lang="en-US" sz="1400" i="1" dirty="0">
                               <a:solidFill>
                                 <a:schemeClr val="tx1"/>
                               </a:solidFill>
@@ -6667,7 +6667,7 @@
                         </m:sSubPr>
                         <m:e>
                           <m:r>
-                            <a:rPr lang="en-US" sz="1600" dirty="0">
+                            <a:rPr lang="en-US" sz="1400" dirty="0">
                               <a:solidFill>
                                 <a:schemeClr val="tx1"/>
                               </a:solidFill>
@@ -6678,7 +6678,7 @@
                         </m:e>
                         <m:sub>
                           <m:r>
-                            <a:rPr lang="en-US" sz="1600" i="1" dirty="0">
+                            <a:rPr lang="en-US" sz="1400" i="1" dirty="0">
                               <a:solidFill>
                                 <a:schemeClr val="tx1"/>
                               </a:solidFill>
@@ -6689,7 +6689,7 @@
                         </m:sub>
                       </m:sSub>
                       <m:r>
-                        <a:rPr lang="en-US" sz="1600" dirty="0">
+                        <a:rPr lang="en-US" sz="1400" dirty="0">
                           <a:solidFill>
                             <a:schemeClr val="tx1"/>
                           </a:solidFill>
@@ -6698,7 +6698,7 @@
                         <m:t>=</m:t>
                       </m:r>
                       <m:r>
-                        <a:rPr lang="en-US" sz="1600" i="1" dirty="0">
+                        <a:rPr lang="en-US" sz="1400" i="1" dirty="0">
                           <a:solidFill>
                             <a:schemeClr val="tx1"/>
                           </a:solidFill>
@@ -6708,7 +6708,7 @@
                         <m:t>𝔼</m:t>
                       </m:r>
                       <m:r>
-                        <a:rPr lang="en-US" sz="1600" i="1" dirty="0">
+                        <a:rPr lang="en-US" sz="1400" i="1" dirty="0">
                           <a:solidFill>
                             <a:schemeClr val="tx1"/>
                           </a:solidFill>
@@ -6720,7 +6720,7 @@
                       <m:sSub>
                         <m:sSubPr>
                           <m:ctrlPr>
-                            <a:rPr lang="en-US" sz="1600" i="1" dirty="0">
+                            <a:rPr lang="en-US" sz="1400" i="1" dirty="0">
                               <a:solidFill>
                                 <a:schemeClr val="tx1"/>
                               </a:solidFill>
@@ -6730,7 +6730,7 @@
                         </m:sSubPr>
                         <m:e>
                           <m:r>
-                            <a:rPr lang="en-US" sz="1600" i="1" dirty="0">
+                            <a:rPr lang="en-US" sz="1400" i="1" dirty="0">
                               <a:solidFill>
                                 <a:schemeClr val="tx1"/>
                               </a:solidFill>
@@ -6741,7 +6741,7 @@
                         </m:e>
                         <m:sub>
                           <m:r>
-                            <a:rPr lang="en-US" sz="1600" i="1" dirty="0">
+                            <a:rPr lang="en-US" sz="1400" i="1" dirty="0">
                               <a:solidFill>
                                 <a:schemeClr val="tx1"/>
                               </a:solidFill>
@@ -6752,7 +6752,7 @@
                         </m:sub>
                       </m:sSub>
                       <m:r>
-                        <a:rPr lang="en-US" sz="1600" i="1" dirty="0">
+                        <a:rPr lang="en-US" sz="1400" i="1" dirty="0">
                           <a:solidFill>
                             <a:schemeClr val="tx1"/>
                           </a:solidFill>
@@ -6763,7 +6763,7 @@
                       <m:sSub>
                         <m:sSubPr>
                           <m:ctrlPr>
-                            <a:rPr lang="en-US" sz="1600" i="1" dirty="0">
+                            <a:rPr lang="en-US" sz="1400" i="1" dirty="0">
                               <a:solidFill>
                                 <a:schemeClr val="tx1"/>
                               </a:solidFill>
@@ -6773,7 +6773,7 @@
                         </m:sSubPr>
                         <m:e>
                           <m:r>
-                            <a:rPr lang="en-US" sz="1600" i="1" dirty="0">
+                            <a:rPr lang="en-US" sz="1400" i="1" dirty="0">
                               <a:solidFill>
                                 <a:schemeClr val="tx1"/>
                               </a:solidFill>
@@ -6786,7 +6786,7 @@
                           <m:sSub>
                             <m:sSubPr>
                               <m:ctrlPr>
-                                <a:rPr lang="en-US" sz="1600" i="1" dirty="0">
+                                <a:rPr lang="en-US" sz="1400" i="1" dirty="0">
                                   <a:solidFill>
                                     <a:schemeClr val="tx1"/>
                                   </a:solidFill>
@@ -6796,7 +6796,7 @@
                             </m:sSubPr>
                             <m:e>
                               <m:r>
-                                <a:rPr lang="en-US" sz="1600" i="1" dirty="0">
+                                <a:rPr lang="en-US" sz="1400" i="1" dirty="0">
                                   <a:solidFill>
                                     <a:schemeClr val="tx1"/>
                                   </a:solidFill>
@@ -6807,7 +6807,7 @@
                             </m:e>
                             <m:sub>
                               <m:r>
-                                <a:rPr lang="en-US" sz="1600" i="1" dirty="0">
+                                <a:rPr lang="en-US" sz="1400" i="1" dirty="0">
                                   <a:solidFill>
                                     <a:schemeClr val="tx1"/>
                                   </a:solidFill>
@@ -6816,7 +6816,7 @@
                                 <m:t>0:</m:t>
                               </m:r>
                               <m:r>
-                                <a:rPr lang="en-US" sz="1600" i="1" dirty="0">
+                                <a:rPr lang="en-US" sz="1400" i="1" dirty="0">
                                   <a:solidFill>
                                     <a:schemeClr val="tx1"/>
                                   </a:solidFill>
@@ -6829,7 +6829,7 @@
                         </m:sub>
                       </m:sSub>
                       <m:r>
-                        <a:rPr lang="en-US" sz="1600" i="1" dirty="0">
+                        <a:rPr lang="en-US" sz="1400" i="1" dirty="0">
                           <a:solidFill>
                             <a:schemeClr val="tx1"/>
                           </a:solidFill>
@@ -6840,7 +6840,7 @@
                       <m:sSub>
                         <m:sSubPr>
                           <m:ctrlPr>
-                            <a:rPr lang="en-US" sz="1600" i="1" dirty="0">
+                            <a:rPr lang="en-US" sz="1400" i="1" dirty="0">
                               <a:solidFill>
                                 <a:schemeClr val="tx1"/>
                               </a:solidFill>
@@ -6850,7 +6850,7 @@
                         </m:sSubPr>
                         <m:e>
                           <m:r>
-                            <a:rPr lang="en-US" sz="1600" i="1" dirty="0">
+                            <a:rPr lang="en-US" sz="1400" i="1" dirty="0">
                               <a:solidFill>
                                 <a:schemeClr val="tx1"/>
                               </a:solidFill>
@@ -6861,7 +6861,7 @@
                         </m:e>
                         <m:sub>
                           <m:r>
-                            <a:rPr lang="en-US" sz="1600" i="1" dirty="0">
+                            <a:rPr lang="en-US" sz="1400" i="1" dirty="0">
                               <a:solidFill>
                                 <a:schemeClr val="tx1"/>
                               </a:solidFill>
@@ -6870,7 +6870,7 @@
                             <m:t>0:</m:t>
                           </m:r>
                           <m:r>
-                            <a:rPr lang="en-US" sz="1600" i="1" dirty="0">
+                            <a:rPr lang="en-US" sz="1400" i="1" dirty="0">
                               <a:solidFill>
                                 <a:schemeClr val="tx1"/>
                               </a:solidFill>
@@ -6881,30 +6881,20 @@
                         </m:sub>
                       </m:sSub>
                       <m:r>
-                        <a:rPr lang="en-US" sz="1600" i="1" dirty="0">
+                        <a:rPr lang="en-US" sz="1400" i="1" dirty="0">
                           <a:solidFill>
                             <a:schemeClr val="tx1"/>
                           </a:solidFill>
                           <a:latin typeface="Cambria Math" panose="02040503050406030204" pitchFamily="18" charset="0"/>
                           <a:ea typeface="Cambria Math" panose="02040503050406030204" pitchFamily="18" charset="0"/>
                         </a:rPr>
-                        <m:t>]</m:t>
-                      </m:r>
-                      <m:r>
-                        <a:rPr lang="en-US" sz="1600" i="1" dirty="0">
-                          <a:solidFill>
-                            <a:schemeClr val="tx1"/>
-                          </a:solidFill>
-                          <a:latin typeface="Cambria Math" panose="02040503050406030204" pitchFamily="18" charset="0"/>
-                          <a:ea typeface="Cambria Math" panose="02040503050406030204" pitchFamily="18" charset="0"/>
-                        </a:rPr>
-                        <m:t>≈</m:t>
+                        <m:t>]≈</m:t>
                       </m:r>
                       <m:nary>
                         <m:naryPr>
                           <m:chr m:val="∑"/>
                           <m:ctrlPr>
-                            <a:rPr lang="en-US" sz="1600" i="1" dirty="0">
+                            <a:rPr lang="en-US" sz="1400" i="1" dirty="0">
                               <a:solidFill>
                                 <a:schemeClr val="tx1"/>
                               </a:solidFill>
@@ -6917,7 +6907,7 @@
                             <m:rPr>
                               <m:brk m:alnAt="23"/>
                             </m:rPr>
-                            <a:rPr lang="en-US" sz="1600" dirty="0">
+                            <a:rPr lang="en-US" sz="1400" dirty="0">
                               <a:solidFill>
                                 <a:schemeClr val="tx1"/>
                               </a:solidFill>
@@ -6926,7 +6916,7 @@
                             <m:t>𝑖</m:t>
                           </m:r>
                           <m:r>
-                            <a:rPr lang="en-US" sz="1600" dirty="0">
+                            <a:rPr lang="en-US" sz="1400" dirty="0">
                               <a:solidFill>
                                 <a:schemeClr val="tx1"/>
                               </a:solidFill>
@@ -6937,7 +6927,7 @@
                         </m:sub>
                         <m:sup>
                           <m:r>
-                            <a:rPr lang="en-US" sz="1600" dirty="0">
+                            <a:rPr lang="en-US" sz="1400" dirty="0">
                               <a:solidFill>
                                 <a:schemeClr val="tx1"/>
                               </a:solidFill>
@@ -6950,7 +6940,7 @@
                           <m:sSubSup>
                             <m:sSubSupPr>
                               <m:ctrlPr>
-                                <a:rPr lang="en-US" sz="1600" i="1" dirty="0">
+                                <a:rPr lang="en-US" sz="1400" i="1" dirty="0">
                                   <a:solidFill>
                                     <a:schemeClr val="tx1"/>
                                   </a:solidFill>
@@ -6960,7 +6950,7 @@
                             </m:sSubSupPr>
                             <m:e>
                               <m:r>
-                                <a:rPr lang="en-US" sz="1600" i="1" dirty="0">
+                                <a:rPr lang="en-US" sz="1400" i="1" dirty="0">
                                   <a:solidFill>
                                     <a:schemeClr val="tx1"/>
                                   </a:solidFill>
@@ -6971,7 +6961,7 @@
                             </m:e>
                             <m:sub>
                               <m:r>
-                                <a:rPr lang="en-US" sz="1600" i="1" dirty="0">
+                                <a:rPr lang="en-US" sz="1400" i="1" dirty="0">
                                   <a:solidFill>
                                     <a:schemeClr val="tx1"/>
                                   </a:solidFill>
@@ -6984,7 +6974,7 @@
                               <m:d>
                                 <m:dPr>
                                   <m:ctrlPr>
-                                    <a:rPr lang="en-US" sz="1600" i="1" dirty="0">
+                                    <a:rPr lang="en-US" sz="1400" i="1" dirty="0">
                                       <a:solidFill>
                                         <a:schemeClr val="tx1"/>
                                       </a:solidFill>
@@ -6994,7 +6984,7 @@
                                 </m:dPr>
                                 <m:e>
                                   <m:r>
-                                    <a:rPr lang="en-US" sz="1600" dirty="0">
+                                    <a:rPr lang="en-US" sz="1400" dirty="0">
                                       <a:solidFill>
                                         <a:schemeClr val="tx1"/>
                                       </a:solidFill>
@@ -7009,7 +6999,7 @@
                         </m:e>
                       </m:nary>
                       <m:r>
-                        <a:rPr lang="en-US" sz="1600" dirty="0">
+                        <a:rPr lang="en-US" sz="1400" dirty="0">
                           <a:solidFill>
                             <a:schemeClr val="tx1"/>
                           </a:solidFill>
@@ -7022,7 +7012,7 @@
                           <m:begChr m:val="["/>
                           <m:endChr m:val="]"/>
                           <m:ctrlPr>
-                            <a:rPr lang="en-US" sz="1600" i="1" dirty="0">
+                            <a:rPr lang="en-US" sz="1400" i="1" dirty="0">
                               <a:solidFill>
                                 <a:schemeClr val="tx1"/>
                               </a:solidFill>
@@ -7034,7 +7024,7 @@
                           <m:sSub>
                             <m:sSubPr>
                               <m:ctrlPr>
-                                <a:rPr lang="en-US" sz="1600" i="1" dirty="0">
+                                <a:rPr lang="en-US" sz="1400" i="1" dirty="0">
                                   <a:solidFill>
                                     <a:schemeClr val="tx1"/>
                                   </a:solidFill>
@@ -7044,7 +7034,7 @@
                             </m:sSubPr>
                             <m:e>
                               <m:r>
-                                <a:rPr lang="en-US" sz="1600" dirty="0">
+                                <a:rPr lang="en-US" sz="1400" dirty="0">
                                   <a:solidFill>
                                     <a:schemeClr val="tx1"/>
                                   </a:solidFill>
@@ -7055,7 +7045,7 @@
                             </m:e>
                             <m:sub>
                               <m:r>
-                                <a:rPr lang="en-US" sz="1600" dirty="0">
+                                <a:rPr lang="en-US" sz="1400" dirty="0">
                                   <a:solidFill>
                                     <a:schemeClr val="tx1"/>
                                   </a:solidFill>
@@ -7066,7 +7056,7 @@
                             </m:sub>
                           </m:sSub>
                           <m:r>
-                            <a:rPr lang="en-US" sz="1600" dirty="0">
+                            <a:rPr lang="en-US" sz="1400" dirty="0">
                               <a:solidFill>
                                 <a:schemeClr val="tx1"/>
                               </a:solidFill>
@@ -7077,7 +7067,7 @@
                           <m:sSubSup>
                             <m:sSubSupPr>
                               <m:ctrlPr>
-                                <a:rPr lang="en-US" sz="1600" i="1" dirty="0">
+                                <a:rPr lang="en-US" sz="1400" i="1" dirty="0">
                                   <a:solidFill>
                                     <a:schemeClr val="tx1"/>
                                   </a:solidFill>
@@ -7090,7 +7080,7 @@
                                 <m:accPr>
                                   <m:chr m:val="̃"/>
                                   <m:ctrlPr>
-                                    <a:rPr lang="en-US" sz="1600" i="1" dirty="0">
+                                    <a:rPr lang="en-US" sz="1400" i="1" dirty="0">
                                       <a:solidFill>
                                         <a:schemeClr val="tx1"/>
                                       </a:solidFill>
@@ -7100,7 +7090,7 @@
                                 </m:accPr>
                                 <m:e>
                                   <m:r>
-                                    <a:rPr lang="en-US" sz="1600" i="1" dirty="0">
+                                    <a:rPr lang="en-US" sz="1400" i="1" dirty="0">
                                       <a:solidFill>
                                         <a:schemeClr val="tx1"/>
                                       </a:solidFill>
@@ -7113,7 +7103,7 @@
                             </m:e>
                             <m:sub>
                               <m:r>
-                                <a:rPr lang="en-US" sz="1600" i="1" dirty="0">
+                                <a:rPr lang="en-US" sz="1400" i="1" dirty="0">
                                   <a:solidFill>
                                     <a:schemeClr val="tx1"/>
                                   </a:solidFill>
@@ -7126,7 +7116,7 @@
                               <m:d>
                                 <m:dPr>
                                   <m:ctrlPr>
-                                    <a:rPr lang="en-US" sz="1600" i="1" dirty="0">
+                                    <a:rPr lang="en-US" sz="1400" i="1" dirty="0">
                                       <a:solidFill>
                                         <a:schemeClr val="tx1"/>
                                       </a:solidFill>
@@ -7136,7 +7126,7 @@
                                 </m:dPr>
                                 <m:e>
                                   <m:r>
-                                    <a:rPr lang="en-US" sz="1600" i="1" dirty="0">
+                                    <a:rPr lang="en-US" sz="1400" i="1" dirty="0">
                                       <a:solidFill>
                                         <a:schemeClr val="tx1"/>
                                       </a:solidFill>
@@ -7179,8 +7169,8 @@
             </p:nvSpPr>
             <p:spPr>
               <a:xfrm>
-                <a:off x="7000517" y="883431"/>
-                <a:ext cx="4399547" cy="1847634"/>
+                <a:off x="7001084" y="955111"/>
+                <a:ext cx="4399547" cy="1651594"/>
               </a:xfrm>
               <a:prstGeom prst="rect">
                 <a:avLst/>
@@ -7188,7 +7178,7 @@
               <a:blipFill>
                 <a:blip r:embed="rId8"/>
                 <a:stretch>
-                  <a:fillRect t="-23810" b="-61224"/>
+                  <a:fillRect t="-19697" b="-59848"/>
                 </a:stretch>
               </a:blipFill>
             </p:spPr>
@@ -7207,8 +7197,8 @@
           </p:sp>
         </mc:Fallback>
       </mc:AlternateContent>
-      <mc:AlternateContent xmlns:mc="http://schemas.openxmlformats.org/markup-compatibility/2006">
-        <mc:Choice xmlns:a14="http://schemas.microsoft.com/office/drawing/2010/main" Requires="a14">
+      <mc:AlternateContent xmlns:mc="http://schemas.openxmlformats.org/markup-compatibility/2006" xmlns:a14="http://schemas.microsoft.com/office/drawing/2010/main">
+        <mc:Choice Requires="a14">
           <p:sp>
             <p:nvSpPr>
               <p:cNvPr id="126" name="TextBox 125">
@@ -7342,7 +7332,7 @@
             </p:txBody>
           </p:sp>
         </mc:Choice>
-        <mc:Fallback>
+        <mc:Fallback xmlns="">
           <p:sp>
             <p:nvSpPr>
               <p:cNvPr id="126" name="TextBox 125">
@@ -7387,8 +7377,8 @@
           </p:sp>
         </mc:Fallback>
       </mc:AlternateContent>
-      <mc:AlternateContent xmlns:mc="http://schemas.openxmlformats.org/markup-compatibility/2006">
-        <mc:Choice xmlns:a14="http://schemas.microsoft.com/office/drawing/2010/main" Requires="a14">
+      <mc:AlternateContent xmlns:mc="http://schemas.openxmlformats.org/markup-compatibility/2006" xmlns:a14="http://schemas.microsoft.com/office/drawing/2010/main">
+        <mc:Choice Requires="a14">
           <p:sp>
             <p:nvSpPr>
               <p:cNvPr id="132" name="TextBox 131">
@@ -7528,7 +7518,7 @@
             </p:txBody>
           </p:sp>
         </mc:Choice>
-        <mc:Fallback>
+        <mc:Fallback xmlns="">
           <p:sp>
             <p:nvSpPr>
               <p:cNvPr id="132" name="TextBox 131">
@@ -7591,8 +7581,8 @@
         </p:nvCxnSpPr>
         <p:spPr>
           <a:xfrm flipV="1">
-            <a:off x="4783376" y="1807251"/>
-            <a:ext cx="2217141" cy="687589"/>
+            <a:off x="4783373" y="1780908"/>
+            <a:ext cx="2217711" cy="703218"/>
           </a:xfrm>
           <a:prstGeom prst="bentConnector3">
             <a:avLst>
@@ -7640,7 +7630,7 @@
         <p:spPr>
           <a:xfrm flipV="1">
             <a:off x="316972" y="1401819"/>
-            <a:ext cx="1515849" cy="1093020"/>
+            <a:ext cx="1515849" cy="1076394"/>
           </a:xfrm>
           <a:prstGeom prst="bentConnector3">
             <a:avLst>
@@ -7687,8 +7677,8 @@
         </p:nvCxnSpPr>
         <p:spPr>
           <a:xfrm>
-            <a:off x="316972" y="2494839"/>
-            <a:ext cx="1197793" cy="1"/>
+            <a:off x="316972" y="2478213"/>
+            <a:ext cx="1197793" cy="5913"/>
           </a:xfrm>
           <a:prstGeom prst="straightConnector1">
             <a:avLst/>
@@ -7734,7 +7724,7 @@
         <p:spPr>
           <a:xfrm>
             <a:off x="3149069" y="1754913"/>
-            <a:ext cx="0" cy="303534"/>
+            <a:ext cx="0" cy="303537"/>
           </a:xfrm>
           <a:prstGeom prst="straightConnector1">
             <a:avLst/>
@@ -7779,8 +7769,8 @@
         </p:nvCxnSpPr>
         <p:spPr>
           <a:xfrm flipH="1">
-            <a:off x="9200286" y="2731065"/>
-            <a:ext cx="2" cy="517224"/>
+            <a:off x="9200286" y="2606705"/>
+            <a:ext cx="572" cy="641587"/>
           </a:xfrm>
           <a:prstGeom prst="straightConnector1">
             <a:avLst/>
@@ -7858,7 +7848,7 @@
             </p:nvSpPr>
             <p:spPr>
               <a:xfrm>
-                <a:off x="5397734" y="1356978"/>
+                <a:off x="5436431" y="1355233"/>
                 <a:ext cx="1240603" cy="549702"/>
               </a:xfrm>
               <a:prstGeom prst="rect">
@@ -8079,7 +8069,7 @@
             </p:nvSpPr>
             <p:spPr>
               <a:xfrm>
-                <a:off x="5397734" y="1356978"/>
+                <a:off x="5436431" y="1355233"/>
                 <a:ext cx="1240603" cy="549702"/>
               </a:xfrm>
               <a:prstGeom prst="rect">
@@ -8299,7 +8289,7 @@
         </p:nvSpPr>
         <p:spPr>
           <a:xfrm>
-            <a:off x="235139" y="2454652"/>
+            <a:off x="235139" y="2438026"/>
             <a:ext cx="81833" cy="80373"/>
           </a:xfrm>
           <a:prstGeom prst="ellipse">
